--- a/classes/parte-15-seguridad-de-ia-y-machine-learning/292-ataques-adversariales-a-modelos/clase-292-presentacion.pptx
+++ b/classes/parte-15-seguridad-de-ia-y-machine-learning/292-ataques-adversariales-a-modelos/clase-292-presentacion.pptx
@@ -17,6 +17,10 @@
     <p:sldId id="265" r:id="rId16"/>
     <p:sldId id="266" r:id="rId17"/>
     <p:sldId id="267" r:id="rId18"/>
+    <p:sldId id="268" r:id="rId19"/>
+    <p:sldId id="269" r:id="rId20"/>
+    <p:sldId id="270" r:id="rId21"/>
+    <p:sldId id="271" r:id="rId22"/>
   </p:sldIdLst>
   <p:sldSz cx="9144000" cy="6858000" type="screen4x3"/>
   <p:notesSz cx="6858000" cy="9144000"/>
@@ -3198,7 +3202,7 @@
                   <a:srgbClr val="0B3D2E"/>
                 </a:solidFill>
               </a:rPr>
-              <a:t>⚠️ Errores comunes</a:t>
+              <a:t>🧪 Laboratorio guiado</a:t>
             </a:r>
           </a:p>
         </p:txBody>
@@ -3236,67 +3240,97 @@
                   <a:srgbClr val="22282E"/>
                 </a:solidFill>
               </a:rPr>
-              <a:t>•  El ataque no reduce la precisión — Falta clipvalues o el modelo está en modo eval sin gradientes. Verifica el wrapper de ART.</a:t>
-            </a:r>
-          </a:p>
-          <a:p>
-            <a:pPr>
-              <a:spcAft>
-                <a:spcPts val="600"/>
-              </a:spcAft>
-            </a:pPr>
-            <a:r>
-              <a:rPr sz="1500">
-                <a:solidFill>
-                  <a:srgbClr val="22282E"/>
-                </a:solidFill>
-              </a:rPr>
-              <a:t>•  Perturbaciones visibles/feas — ε demasiado alto. Baja ε y usa PGD iterativo en vez de FGSM.</a:t>
-            </a:r>
-          </a:p>
-          <a:p>
-            <a:pPr>
-              <a:spcAft>
-                <a:spcPts val="600"/>
-              </a:spcAft>
-            </a:pPr>
-            <a:r>
-              <a:rPr sz="1500">
-                <a:solidFill>
-                  <a:srgbClr val="22282E"/>
-                </a:solidFill>
-              </a:rPr>
-              <a:t>•  "Defensa perfecta" con gradient masking — La defensa ofusca gradientes, no aporta robustez real. Evalúa con ataques de caja negra/transferencia.</a:t>
-            </a:r>
-          </a:p>
-          <a:p>
-            <a:pPr>
-              <a:spcAft>
-                <a:spcPts val="600"/>
-              </a:spcAft>
-            </a:pPr>
-            <a:r>
-              <a:rPr sz="1500">
-                <a:solidFill>
-                  <a:srgbClr val="22282E"/>
-                </a:solidFill>
-              </a:rPr>
-              <a:t>•  Precisión limpia se hunde tras defender — ε de entrenamiento demasiado alto. Ajusta y busca el punto de equilibrio.</a:t>
-            </a:r>
-          </a:p>
-          <a:p>
-            <a:pPr>
-              <a:spcAft>
-                <a:spcPts val="600"/>
-              </a:spcAft>
-            </a:pPr>
-            <a:r>
-              <a:rPr sz="1500">
-                <a:solidFill>
-                  <a:srgbClr val="22282E"/>
-                </a:solidFill>
-              </a:rPr>
-              <a:t>•  Adversariales no transfieren — Modelos muy distintos o regularización fuerte. Usa un sustituto más parecido.</a:t>
+              <a:t>•  Todo sobre un modelo y dataset propios.</a:t>
+            </a:r>
+          </a:p>
+          <a:p>
+            <a:pPr>
+              <a:spcAft>
+                <a:spcPts val="600"/>
+              </a:spcAft>
+            </a:pPr>
+            <a:r>
+              <a:rPr sz="1500">
+                <a:solidFill>
+                  <a:srgbClr val="22282E"/>
+                </a:solidFill>
+              </a:rPr>
+              <a:t>•  Entrena o carga un clasificador. Una CNN sobre MNIST alcanza &gt;98% en test limpio. Guarda model.pt.</a:t>
+            </a:r>
+          </a:p>
+          <a:p>
+            <a:pPr>
+              <a:spcAft>
+                <a:spcPts val="600"/>
+              </a:spcAft>
+            </a:pPr>
+            <a:r>
+              <a:rPr sz="1500">
+                <a:solidFill>
+                  <a:srgbClr val="22282E"/>
+                </a:solidFill>
+              </a:rPr>
+              <a:t>•  Envuelve el modelo con ART.</a:t>
+            </a:r>
+          </a:p>
+          <a:p>
+            <a:pPr>
+              <a:spcAft>
+                <a:spcPts val="600"/>
+              </a:spcAft>
+            </a:pPr>
+            <a:r>
+              <a:rPr sz="1500">
+                <a:solidFill>
+                  <a:srgbClr val="22282E"/>
+                </a:solidFill>
+              </a:rPr>
+              <a:t>•  Mide la precisión limpia sobre el test set y anótala como línea base.</a:t>
+            </a:r>
+          </a:p>
+          <a:p>
+            <a:pPr>
+              <a:spcAft>
+                <a:spcPts val="600"/>
+              </a:spcAft>
+            </a:pPr>
+            <a:r>
+              <a:rPr sz="1500">
+                <a:solidFill>
+                  <a:srgbClr val="22282E"/>
+                </a:solidFill>
+              </a:rPr>
+              <a:t>•  Genera FGSM.</a:t>
+            </a:r>
+          </a:p>
+          <a:p>
+            <a:pPr>
+              <a:spcAft>
+                <a:spcPts val="600"/>
+              </a:spcAft>
+            </a:pPr>
+            <a:r>
+              <a:rPr sz="1500">
+                <a:solidFill>
+                  <a:srgbClr val="22282E"/>
+                </a:solidFill>
+              </a:rPr>
+              <a:t>•  Evalúa la precisión sobre xadv: debería desplomarse.</a:t>
+            </a:r>
+          </a:p>
+          <a:p>
+            <a:pPr>
+              <a:spcAft>
+                <a:spcPts val="600"/>
+              </a:spcAft>
+            </a:pPr>
+            <a:r>
+              <a:rPr sz="1500">
+                <a:solidFill>
+                  <a:srgbClr val="22282E"/>
+                </a:solidFill>
+              </a:rPr>
+              <a:t>•  Genera PGD (ProjectedGradientDescent, eps=0.2, maxiter=40) y compara: PGD suele ser más efectivo que FGSM con el mismo ε.</a:t>
             </a:r>
           </a:p>
         </p:txBody>
@@ -3347,7 +3381,7 @@
                   <a:srgbClr val="0B3D2E"/>
                 </a:solidFill>
               </a:rPr>
-              <a:t>❓ Preguntas frecuentes</a:t>
+              <a:t>✍️ Ejercicios</a:t>
             </a:r>
           </a:p>
         </p:txBody>
@@ -3385,97 +3419,82 @@
                   <a:srgbClr val="22282E"/>
                 </a:solidFill>
               </a:rPr>
-              <a:t>•  ❓ ¿Por qué existen los ejemplos adversariales?</a:t>
-            </a:r>
-          </a:p>
-          <a:p>
-            <a:pPr>
-              <a:spcAft>
-                <a:spcPts val="600"/>
-              </a:spcAft>
-            </a:pPr>
-            <a:r>
-              <a:rPr sz="1500">
-                <a:solidFill>
-                  <a:srgbClr val="22282E"/>
-                </a:solidFill>
-              </a:rPr>
-              <a:t>•  Las redes profundas son localmente casi lineales en dimensiones muy altas; pequeñas perturbaciones alineadas con el gradiente se suman y empujan la salida sobre la frontera de decisión (Goodfellow et al.).</a:t>
-            </a:r>
-          </a:p>
-          <a:p>
-            <a:pPr>
-              <a:spcAft>
-                <a:spcPts val="600"/>
-              </a:spcAft>
-            </a:pPr>
-            <a:r>
-              <a:rPr sz="1500">
-                <a:solidFill>
-                  <a:srgbClr val="22282E"/>
-                </a:solidFill>
-              </a:rPr>
-              <a:t>•  ❓ ¿Sirve la detección de adversariales en lugar de la robustez?</a:t>
-            </a:r>
-          </a:p>
-          <a:p>
-            <a:pPr>
-              <a:spcAft>
-                <a:spcPts val="600"/>
-              </a:spcAft>
-            </a:pPr>
-            <a:r>
-              <a:rPr sz="1500">
-                <a:solidFill>
-                  <a:srgbClr val="22282E"/>
-                </a:solidFill>
-              </a:rPr>
-              <a:t>•  Ayuda, pero muchos detectores se rompen ante ataques adaptativos que también engañan al detector. La robustez certificada o el entrenamiento adversarial son más sólidos.</a:t>
-            </a:r>
-          </a:p>
-          <a:p>
-            <a:pPr>
-              <a:spcAft>
-                <a:spcPts val="600"/>
-              </a:spcAft>
-            </a:pPr>
-            <a:r>
-              <a:rPr sz="1500">
-                <a:solidFill>
-                  <a:srgbClr val="22282E"/>
-                </a:solidFill>
-              </a:rPr>
-              <a:t>•  ❓ ¿Esto solo afecta a imágenes?</a:t>
-            </a:r>
-          </a:p>
-          <a:p>
-            <a:pPr>
-              <a:spcAft>
-                <a:spcPts val="600"/>
-              </a:spcAft>
-            </a:pPr>
-            <a:r>
-              <a:rPr sz="1500">
-                <a:solidFill>
-                  <a:srgbClr val="22282E"/>
-                </a:solidFill>
-              </a:rPr>
-              <a:t>•  No. Hay adversariales en audio, texto (sustituciones de palabras), malware (bytes que evaden clasificadores) y datos tabulares. El principio del gradiente es el mismo.</a:t>
-            </a:r>
-          </a:p>
-          <a:p>
-            <a:pPr>
-              <a:spcAft>
-                <a:spcPts val="600"/>
-              </a:spcAft>
-            </a:pPr>
-            <a:r>
-              <a:rPr sz="1500">
-                <a:solidFill>
-                  <a:srgbClr val="22282E"/>
-                </a:solidFill>
-              </a:rPr>
-              <a:t>•  ❓ ¿Qué es un ataque físico?</a:t>
+              <a:t>•  Explica por qué sign() del gradiente maximiza la pérdida bajo una restricción L∞.</a:t>
+            </a:r>
+          </a:p>
+          <a:p>
+            <a:pPr>
+              <a:spcAft>
+                <a:spcPts val="600"/>
+              </a:spcAft>
+            </a:pPr>
+            <a:r>
+              <a:rPr sz="1500">
+                <a:solidFill>
+                  <a:srgbClr val="22282E"/>
+                </a:solidFill>
+              </a:rPr>
+              <a:t>•  Compara la precisión adversarial de FGSM vs. PGD para el mismo ε y explica la diferencia.</a:t>
+            </a:r>
+          </a:p>
+          <a:p>
+            <a:pPr>
+              <a:spcAft>
+                <a:spcPts val="600"/>
+              </a:spcAft>
+            </a:pPr>
+            <a:r>
+              <a:rPr sz="1500">
+                <a:solidFill>
+                  <a:srgbClr val="22282E"/>
+                </a:solidFill>
+              </a:rPr>
+              <a:t>•  Genera adversariales con un modelo A y evalúalos en un modelo B distinto; mide la transferibilidad.</a:t>
+            </a:r>
+          </a:p>
+          <a:p>
+            <a:pPr>
+              <a:spcAft>
+                <a:spcPts val="600"/>
+              </a:spcAft>
+            </a:pPr>
+            <a:r>
+              <a:rPr sz="1500">
+                <a:solidFill>
+                  <a:srgbClr val="22282E"/>
+                </a:solidFill>
+              </a:rPr>
+              <a:t>•  Implementa un ataque L2 (CarliniL2Method) y compara la magnitud de perturbación con L∞.</a:t>
+            </a:r>
+          </a:p>
+          <a:p>
+            <a:pPr>
+              <a:spcAft>
+                <a:spcPts val="600"/>
+              </a:spcAft>
+            </a:pPr>
+            <a:r>
+              <a:rPr sz="1500">
+                <a:solidFill>
+                  <a:srgbClr val="22282E"/>
+                </a:solidFill>
+              </a:rPr>
+              <a:t>•  Muestra 5 pares (original, adversarial) y comenta si un humano notaría la diferencia.</a:t>
+            </a:r>
+          </a:p>
+          <a:p>
+            <a:pPr>
+              <a:spcAft>
+                <a:spcPts val="600"/>
+              </a:spcAft>
+            </a:pPr>
+            <a:r>
+              <a:rPr sz="1500">
+                <a:solidFill>
+                  <a:srgbClr val="22282E"/>
+                </a:solidFill>
+              </a:rPr>
+              <a:t>•  Estima cuánto más tarda el entrenamiento adversarial frente al normal y discute si compensa.</a:t>
             </a:r>
           </a:p>
         </p:txBody>
@@ -3526,7 +3545,7 @@
                   <a:srgbClr val="0B3D2E"/>
                 </a:solidFill>
               </a:rPr>
-              <a:t>🔗 Referencias</a:t>
+              <a:t>📝 Reto verificable</a:t>
             </a:r>
           </a:p>
         </p:txBody>
@@ -3564,6 +3583,438 @@
                   <a:srgbClr val="22282E"/>
                 </a:solidFill>
               </a:rPr>
+              <a:t>•  Entrega un informe de robustez de tu clasificador con: precisión limpia base, curva precisión vs. ε para PGD, un ejemplo dirigido exitoso, y la comparación antes/después de entrenamiento adversarial.</a:t>
+            </a:r>
+          </a:p>
+          <a:p>
+            <a:pPr>
+              <a:spcAft>
+                <a:spcPts val="600"/>
+              </a:spcAft>
+            </a:pPr>
+            <a:r>
+              <a:rPr sz="1500">
+                <a:solidFill>
+                  <a:srgbClr val="22282E"/>
+                </a:solidFill>
+              </a:rPr>
+              <a:t>•  Criterio de aceptación: con entrenamiento adversarial, la precisión bajo PGD (ε=0.2) mejora al menos 30 puntos porcentuales respecto al modelo sin defender, y el informe cuantifica explícitamente la…</a:t>
+            </a:r>
+          </a:p>
+        </p:txBody>
+      </p:sp>
+    </p:spTree>
+  </p:cSld>
+  <p:clrMapOvr>
+    <a:masterClrMapping/>
+  </p:clrMapOvr>
+</p:sld>
+</file>
+
+<file path=ppt/slides/slide13.xml><?xml version="1.0" encoding="utf-8"?>
+<p:sld xmlns:a="http://schemas.openxmlformats.org/drawingml/2006/main" xmlns:p="http://schemas.openxmlformats.org/presentationml/2006/main" xmlns:r="http://schemas.openxmlformats.org/officeDocument/2006/relationships">
+  <p:cSld>
+    <p:spTree>
+      <p:nvGrpSpPr>
+        <p:cNvPr id="1" name=""/>
+        <p:cNvGrpSpPr/>
+        <p:nvPr/>
+      </p:nvGrpSpPr>
+      <p:grpSpPr/>
+      <p:sp>
+        <p:nvSpPr>
+          <p:cNvPr id="2" name="TextBox 1"/>
+          <p:cNvSpPr txBox="1"/>
+          <p:nvPr/>
+        </p:nvSpPr>
+        <p:spPr>
+          <a:xfrm>
+            <a:off x="457200" y="320040"/>
+            <a:ext cx="8229600" cy="822960"/>
+          </a:xfrm>
+          <a:prstGeom prst="rect">
+            <a:avLst/>
+          </a:prstGeom>
+          <a:noFill/>
+        </p:spPr>
+        <p:txBody>
+          <a:bodyPr wrap="square">
+            <a:spAutoFit/>
+          </a:bodyPr>
+          <a:lstStyle/>
+          <a:p>
+            <a:r>
+              <a:rPr sz="2600" b="1">
+                <a:solidFill>
+                  <a:srgbClr val="0B3D2E"/>
+                </a:solidFill>
+              </a:rPr>
+              <a:t>⚠️ Errores comunes</a:t>
+            </a:r>
+          </a:p>
+        </p:txBody>
+      </p:sp>
+      <p:sp>
+        <p:nvSpPr>
+          <p:cNvPr id="3" name="TextBox 2"/>
+          <p:cNvSpPr txBox="1"/>
+          <p:nvPr/>
+        </p:nvSpPr>
+        <p:spPr>
+          <a:xfrm>
+            <a:off x="457200" y="1280160"/>
+            <a:ext cx="8229600" cy="4937760"/>
+          </a:xfrm>
+          <a:prstGeom prst="rect">
+            <a:avLst/>
+          </a:prstGeom>
+          <a:noFill/>
+        </p:spPr>
+        <p:txBody>
+          <a:bodyPr wrap="square">
+            <a:spAutoFit/>
+          </a:bodyPr>
+          <a:lstStyle/>
+          <a:p>
+            <a:pPr>
+              <a:spcAft>
+                <a:spcPts val="600"/>
+              </a:spcAft>
+            </a:pPr>
+            <a:r>
+              <a:rPr sz="1500">
+                <a:solidFill>
+                  <a:srgbClr val="22282E"/>
+                </a:solidFill>
+              </a:rPr>
+              <a:t>•  El ataque no reduce la precisión — Falta clipvalues o el modelo está en modo eval sin gradientes. Verifica el wrapper de ART.</a:t>
+            </a:r>
+          </a:p>
+          <a:p>
+            <a:pPr>
+              <a:spcAft>
+                <a:spcPts val="600"/>
+              </a:spcAft>
+            </a:pPr>
+            <a:r>
+              <a:rPr sz="1500">
+                <a:solidFill>
+                  <a:srgbClr val="22282E"/>
+                </a:solidFill>
+              </a:rPr>
+              <a:t>•  Perturbaciones visibles/feas — ε demasiado alto. Baja ε y usa PGD iterativo en vez de FGSM.</a:t>
+            </a:r>
+          </a:p>
+          <a:p>
+            <a:pPr>
+              <a:spcAft>
+                <a:spcPts val="600"/>
+              </a:spcAft>
+            </a:pPr>
+            <a:r>
+              <a:rPr sz="1500">
+                <a:solidFill>
+                  <a:srgbClr val="22282E"/>
+                </a:solidFill>
+              </a:rPr>
+              <a:t>•  "Defensa perfecta" con gradient masking — La defensa ofusca gradientes, no aporta robustez real. Evalúa con ataques de caja negra/transferencia.</a:t>
+            </a:r>
+          </a:p>
+          <a:p>
+            <a:pPr>
+              <a:spcAft>
+                <a:spcPts val="600"/>
+              </a:spcAft>
+            </a:pPr>
+            <a:r>
+              <a:rPr sz="1500">
+                <a:solidFill>
+                  <a:srgbClr val="22282E"/>
+                </a:solidFill>
+              </a:rPr>
+              <a:t>•  Precisión limpia se hunde tras defender — ε de entrenamiento demasiado alto. Ajusta y busca el punto de equilibrio.</a:t>
+            </a:r>
+          </a:p>
+          <a:p>
+            <a:pPr>
+              <a:spcAft>
+                <a:spcPts val="600"/>
+              </a:spcAft>
+            </a:pPr>
+            <a:r>
+              <a:rPr sz="1500">
+                <a:solidFill>
+                  <a:srgbClr val="22282E"/>
+                </a:solidFill>
+              </a:rPr>
+              <a:t>•  Adversariales no transfieren — Modelos muy distintos o regularización fuerte. Usa un sustituto más parecido.</a:t>
+            </a:r>
+          </a:p>
+        </p:txBody>
+      </p:sp>
+    </p:spTree>
+  </p:cSld>
+  <p:clrMapOvr>
+    <a:masterClrMapping/>
+  </p:clrMapOvr>
+</p:sld>
+</file>
+
+<file path=ppt/slides/slide14.xml><?xml version="1.0" encoding="utf-8"?>
+<p:sld xmlns:a="http://schemas.openxmlformats.org/drawingml/2006/main" xmlns:p="http://schemas.openxmlformats.org/presentationml/2006/main" xmlns:r="http://schemas.openxmlformats.org/officeDocument/2006/relationships">
+  <p:cSld>
+    <p:spTree>
+      <p:nvGrpSpPr>
+        <p:cNvPr id="1" name=""/>
+        <p:cNvGrpSpPr/>
+        <p:nvPr/>
+      </p:nvGrpSpPr>
+      <p:grpSpPr/>
+      <p:sp>
+        <p:nvSpPr>
+          <p:cNvPr id="2" name="TextBox 1"/>
+          <p:cNvSpPr txBox="1"/>
+          <p:nvPr/>
+        </p:nvSpPr>
+        <p:spPr>
+          <a:xfrm>
+            <a:off x="457200" y="320040"/>
+            <a:ext cx="8229600" cy="822960"/>
+          </a:xfrm>
+          <a:prstGeom prst="rect">
+            <a:avLst/>
+          </a:prstGeom>
+          <a:noFill/>
+        </p:spPr>
+        <p:txBody>
+          <a:bodyPr wrap="square">
+            <a:spAutoFit/>
+          </a:bodyPr>
+          <a:lstStyle/>
+          <a:p>
+            <a:r>
+              <a:rPr sz="2600" b="1">
+                <a:solidFill>
+                  <a:srgbClr val="0B3D2E"/>
+                </a:solidFill>
+              </a:rPr>
+              <a:t>❓ Preguntas frecuentes</a:t>
+            </a:r>
+          </a:p>
+        </p:txBody>
+      </p:sp>
+      <p:sp>
+        <p:nvSpPr>
+          <p:cNvPr id="3" name="TextBox 2"/>
+          <p:cNvSpPr txBox="1"/>
+          <p:nvPr/>
+        </p:nvSpPr>
+        <p:spPr>
+          <a:xfrm>
+            <a:off x="457200" y="1280160"/>
+            <a:ext cx="8229600" cy="4937760"/>
+          </a:xfrm>
+          <a:prstGeom prst="rect">
+            <a:avLst/>
+          </a:prstGeom>
+          <a:noFill/>
+        </p:spPr>
+        <p:txBody>
+          <a:bodyPr wrap="square">
+            <a:spAutoFit/>
+          </a:bodyPr>
+          <a:lstStyle/>
+          <a:p>
+            <a:pPr>
+              <a:spcAft>
+                <a:spcPts val="600"/>
+              </a:spcAft>
+            </a:pPr>
+            <a:r>
+              <a:rPr sz="1500">
+                <a:solidFill>
+                  <a:srgbClr val="22282E"/>
+                </a:solidFill>
+              </a:rPr>
+              <a:t>•  ❓ ¿Por qué existen los ejemplos adversariales?</a:t>
+            </a:r>
+          </a:p>
+          <a:p>
+            <a:pPr>
+              <a:spcAft>
+                <a:spcPts val="600"/>
+              </a:spcAft>
+            </a:pPr>
+            <a:r>
+              <a:rPr sz="1500">
+                <a:solidFill>
+                  <a:srgbClr val="22282E"/>
+                </a:solidFill>
+              </a:rPr>
+              <a:t>•  Las redes profundas son localmente casi lineales en dimensiones muy altas; pequeñas perturbaciones alineadas con el gradiente se suman y empujan la salida sobre la frontera de decisión (Goodfellow et…</a:t>
+            </a:r>
+          </a:p>
+          <a:p>
+            <a:pPr>
+              <a:spcAft>
+                <a:spcPts val="600"/>
+              </a:spcAft>
+            </a:pPr>
+            <a:r>
+              <a:rPr sz="1500">
+                <a:solidFill>
+                  <a:srgbClr val="22282E"/>
+                </a:solidFill>
+              </a:rPr>
+              <a:t>•  ❓ ¿Sirve la detección de adversariales en lugar de la robustez?</a:t>
+            </a:r>
+          </a:p>
+          <a:p>
+            <a:pPr>
+              <a:spcAft>
+                <a:spcPts val="600"/>
+              </a:spcAft>
+            </a:pPr>
+            <a:r>
+              <a:rPr sz="1500">
+                <a:solidFill>
+                  <a:srgbClr val="22282E"/>
+                </a:solidFill>
+              </a:rPr>
+              <a:t>•  Ayuda, pero muchos detectores se rompen ante ataques adaptativos que también engañan al detector. La robustez certificada o el entrenamiento adversarial son más sólidos.</a:t>
+            </a:r>
+          </a:p>
+          <a:p>
+            <a:pPr>
+              <a:spcAft>
+                <a:spcPts val="600"/>
+              </a:spcAft>
+            </a:pPr>
+            <a:r>
+              <a:rPr sz="1500">
+                <a:solidFill>
+                  <a:srgbClr val="22282E"/>
+                </a:solidFill>
+              </a:rPr>
+              <a:t>•  ❓ ¿Esto solo afecta a imágenes?</a:t>
+            </a:r>
+          </a:p>
+          <a:p>
+            <a:pPr>
+              <a:spcAft>
+                <a:spcPts val="600"/>
+              </a:spcAft>
+            </a:pPr>
+            <a:r>
+              <a:rPr sz="1500">
+                <a:solidFill>
+                  <a:srgbClr val="22282E"/>
+                </a:solidFill>
+              </a:rPr>
+              <a:t>•  No. Hay adversariales en audio, texto (sustituciones de palabras), malware (bytes que evaden clasificadores) y datos tabulares. El principio del gradiente es el mismo.</a:t>
+            </a:r>
+          </a:p>
+          <a:p>
+            <a:pPr>
+              <a:spcAft>
+                <a:spcPts val="600"/>
+              </a:spcAft>
+            </a:pPr>
+            <a:r>
+              <a:rPr sz="1500">
+                <a:solidFill>
+                  <a:srgbClr val="22282E"/>
+                </a:solidFill>
+              </a:rPr>
+              <a:t>•  ❓ ¿Qué es un ataque físico?</a:t>
+            </a:r>
+          </a:p>
+        </p:txBody>
+      </p:sp>
+    </p:spTree>
+  </p:cSld>
+  <p:clrMapOvr>
+    <a:masterClrMapping/>
+  </p:clrMapOvr>
+</p:sld>
+</file>
+
+<file path=ppt/slides/slide15.xml><?xml version="1.0" encoding="utf-8"?>
+<p:sld xmlns:a="http://schemas.openxmlformats.org/drawingml/2006/main" xmlns:p="http://schemas.openxmlformats.org/presentationml/2006/main" xmlns:r="http://schemas.openxmlformats.org/officeDocument/2006/relationships">
+  <p:cSld>
+    <p:spTree>
+      <p:nvGrpSpPr>
+        <p:cNvPr id="1" name=""/>
+        <p:cNvGrpSpPr/>
+        <p:nvPr/>
+      </p:nvGrpSpPr>
+      <p:grpSpPr/>
+      <p:sp>
+        <p:nvSpPr>
+          <p:cNvPr id="2" name="TextBox 1"/>
+          <p:cNvSpPr txBox="1"/>
+          <p:nvPr/>
+        </p:nvSpPr>
+        <p:spPr>
+          <a:xfrm>
+            <a:off x="457200" y="320040"/>
+            <a:ext cx="8229600" cy="822960"/>
+          </a:xfrm>
+          <a:prstGeom prst="rect">
+            <a:avLst/>
+          </a:prstGeom>
+          <a:noFill/>
+        </p:spPr>
+        <p:txBody>
+          <a:bodyPr wrap="square">
+            <a:spAutoFit/>
+          </a:bodyPr>
+          <a:lstStyle/>
+          <a:p>
+            <a:r>
+              <a:rPr sz="2600" b="1">
+                <a:solidFill>
+                  <a:srgbClr val="0B3D2E"/>
+                </a:solidFill>
+              </a:rPr>
+              <a:t>🔗 Referencias</a:t>
+            </a:r>
+          </a:p>
+        </p:txBody>
+      </p:sp>
+      <p:sp>
+        <p:nvSpPr>
+          <p:cNvPr id="3" name="TextBox 2"/>
+          <p:cNvSpPr txBox="1"/>
+          <p:nvPr/>
+        </p:nvSpPr>
+        <p:spPr>
+          <a:xfrm>
+            <a:off x="457200" y="1280160"/>
+            <a:ext cx="8229600" cy="4937760"/>
+          </a:xfrm>
+          <a:prstGeom prst="rect">
+            <a:avLst/>
+          </a:prstGeom>
+          <a:noFill/>
+        </p:spPr>
+        <p:txBody>
+          <a:bodyPr wrap="square">
+            <a:spAutoFit/>
+          </a:bodyPr>
+          <a:lstStyle/>
+          <a:p>
+            <a:pPr>
+              <a:spcAft>
+                <a:spcPts val="600"/>
+              </a:spcAft>
+            </a:pPr>
+            <a:r>
+              <a:rPr sz="1500">
+                <a:solidFill>
+                  <a:srgbClr val="22282E"/>
+                </a:solidFill>
+              </a:rPr>
               <a:t>•  Goodfellow, Shlens &amp; Szegedy, "Explaining and Harnessing Adversarial Examples", ICLR 2015 — &lt;https://arxiv.org/abs/1412.6572&gt;</a:t>
             </a:r>
           </a:p>
@@ -3629,6 +4080,81 @@
           </a:p>
         </p:txBody>
       </p:sp>
+    </p:spTree>
+  </p:cSld>
+  <p:clrMapOvr>
+    <a:masterClrMapping/>
+  </p:clrMapOvr>
+</p:sld>
+</file>
+
+<file path=ppt/slides/slide16.xml><?xml version="1.0" encoding="utf-8"?>
+<p:sld xmlns:a="http://schemas.openxmlformats.org/drawingml/2006/main" xmlns:p="http://schemas.openxmlformats.org/presentationml/2006/main" xmlns:r="http://schemas.openxmlformats.org/officeDocument/2006/relationships">
+  <p:cSld>
+    <p:spTree>
+      <p:nvGrpSpPr>
+        <p:cNvPr id="1" name=""/>
+        <p:cNvGrpSpPr/>
+        <p:nvPr/>
+      </p:nvGrpSpPr>
+      <p:grpSpPr/>
+      <p:sp>
+        <p:nvSpPr>
+          <p:cNvPr id="2" name="TextBox 1"/>
+          <p:cNvSpPr txBox="1"/>
+          <p:nvPr/>
+        </p:nvSpPr>
+        <p:spPr>
+          <a:xfrm>
+            <a:off x="457200" y="274320"/>
+            <a:ext cx="8229600" cy="640080"/>
+          </a:xfrm>
+          <a:prstGeom prst="rect">
+            <a:avLst/>
+          </a:prstGeom>
+          <a:noFill/>
+        </p:spPr>
+        <p:txBody>
+          <a:bodyPr wrap="square">
+            <a:spAutoFit/>
+          </a:bodyPr>
+          <a:lstStyle/>
+          <a:p>
+            <a:r>
+              <a:rPr sz="2200" b="1">
+                <a:solidFill>
+                  <a:srgbClr val="0B3D2E"/>
+                </a:solidFill>
+              </a:rPr>
+              <a:t>Diagrama de la clase</a:t>
+            </a:r>
+          </a:p>
+        </p:txBody>
+      </p:sp>
+      <p:pic>
+        <p:nvPicPr>
+          <p:cNvPr id="3" name="Picture 2" descr="7cca02a5788b3cb5.png"/>
+          <p:cNvPicPr>
+            <a:picLocks noChangeAspect="1"/>
+          </p:cNvPicPr>
+          <p:nvPr/>
+        </p:nvPicPr>
+        <p:blipFill>
+          <a:blip r:embed="rId2"/>
+          <a:stretch>
+            <a:fillRect/>
+          </a:stretch>
+        </p:blipFill>
+        <p:spPr>
+          <a:xfrm>
+            <a:off x="457200" y="3332803"/>
+            <a:ext cx="8229599" cy="832473"/>
+          </a:xfrm>
+          <a:prstGeom prst="rect">
+            <a:avLst/>
+          </a:prstGeom>
+        </p:spPr>
+      </p:pic>
     </p:spTree>
   </p:cSld>
   <p:clrMapOvr>
@@ -3713,7 +4239,7 @@
                   <a:srgbClr val="22282E"/>
                 </a:solidFill>
               </a:rPr>
-              <a:t>•  Comprender por qué existen los ejemplos adversariales y aprender a generarlos, evaluarlos y defenderlos con herramientas reales. El alumno pasará de la teoría del gradiente (FGSM, PGD) a un ataque práctico sobre un clasificador propio usando Adversarial Robustness Toolbox (ART), y medirá la caída de precisión bajo ataque.</a:t>
+              <a:t>•  Comprender por qué existen los ejemplos adversariales y aprender a generarlos, evaluarlos y defenderlos con herramientas reales. El alumno pasará de la teoría del gradiente (FGSM, PGD) a un ataque…</a:t>
             </a:r>
           </a:p>
         </p:txBody>
@@ -4107,7 +4633,7 @@
                   <a:srgbClr val="0B3D2E"/>
                 </a:solidFill>
               </a:rPr>
-              <a:t>📖 Definiciones y características</a:t>
+              <a:t>🧠 Explicación en profundidad</a:t>
             </a:r>
           </a:p>
         </p:txBody>
@@ -4145,97 +4671,37 @@
                   <a:srgbClr val="22282E"/>
                 </a:solidFill>
               </a:rPr>
-              <a:t>•  Ejemplo adversarial: entrada x' = x + δ con ‖δ‖ ≤ ε que causa una predicción errónea. Característica: δ suele ser imperceptible para un humano.</a:t>
-            </a:r>
-          </a:p>
-          <a:p>
-            <a:pPr>
-              <a:spcAft>
-                <a:spcPts val="600"/>
-              </a:spcAft>
-            </a:pPr>
-            <a:r>
-              <a:rPr sz="1500">
-                <a:solidFill>
-                  <a:srgbClr val="22282E"/>
-                </a:solidFill>
-              </a:rPr>
-              <a:t>•  FGSM (Fast Gradient Sign Method): x' = x + ε · sign(∇ₓ J(θ,x,y)). Característica: un solo paso, rápido pero subóptimo.</a:t>
-            </a:r>
-          </a:p>
-          <a:p>
-            <a:pPr>
-              <a:spcAft>
-                <a:spcPts val="600"/>
-              </a:spcAft>
-            </a:pPr>
-            <a:r>
-              <a:rPr sz="1500">
-                <a:solidFill>
-                  <a:srgbClr val="22282E"/>
-                </a:solidFill>
-              </a:rPr>
-              <a:t>•  PGD (Projected Gradient Descent): FGSM iterado con proyección a la bola de radio ε. Característica: ataque fuerte, referencia para evaluar defensas.</a:t>
-            </a:r>
-          </a:p>
-          <a:p>
-            <a:pPr>
-              <a:spcAft>
-                <a:spcPts val="600"/>
-              </a:spcAft>
-            </a:pPr>
-            <a:r>
-              <a:rPr sz="1500">
-                <a:solidFill>
-                  <a:srgbClr val="22282E"/>
-                </a:solidFill>
-              </a:rPr>
-              <a:t>•  Perturbación L∞: limita el cambio máximo por píxel. Característica: la más usada en visión; ε típico 8/255.</a:t>
-            </a:r>
-          </a:p>
-          <a:p>
-            <a:pPr>
-              <a:spcAft>
-                <a:spcPts val="600"/>
-              </a:spcAft>
-            </a:pPr>
-            <a:r>
-              <a:rPr sz="1500">
-                <a:solidFill>
-                  <a:srgbClr val="22282E"/>
-                </a:solidFill>
-              </a:rPr>
-              <a:t>•  Ataque dirigido: fuerza una clase objetivo específica; el no dirigido solo busca cualquier error.</a:t>
-            </a:r>
-          </a:p>
-          <a:p>
-            <a:pPr>
-              <a:spcAft>
-                <a:spcPts val="600"/>
-              </a:spcAft>
-            </a:pPr>
-            <a:r>
-              <a:rPr sz="1500">
-                <a:solidFill>
-                  <a:srgbClr val="22282E"/>
-                </a:solidFill>
-              </a:rPr>
-              <a:t>•  Transferibilidad: un adversarial generado con un modelo sustituto engaña a otro modelo distinto; habilita ataques de caja negra.</a:t>
-            </a:r>
-          </a:p>
-          <a:p>
-            <a:pPr>
-              <a:spcAft>
-                <a:spcPts val="600"/>
-              </a:spcAft>
-            </a:pPr>
-            <a:r>
-              <a:rPr sz="1500">
-                <a:solidFill>
-                  <a:srgbClr val="22282E"/>
-                </a:solidFill>
-              </a:rPr>
-              <a:t>•  Entrenamiento adversarial: entrenar con ejemplos adversariales generados sobre la marcha (Madry et al.); mejora robustez pero reduce precisión limpia y encarece el entrenamiento.</a:t>
+              <a:t>•  Un ejemplo adversarial modifica una entrada bajo un modelo de amenaza para cambiar una decisión. Éxito depende de conocimiento, consultas, restricciones y dominio; una perturbación pequeña en píxeles…</a:t>
+            </a:r>
+          </a:p>
+          <a:p>
+            <a:pPr>
+              <a:spcAft>
+                <a:spcPts val="600"/>
+              </a:spcAft>
+            </a:pPr>
+            <a:r>
+              <a:rPr sz="1500">
+                <a:solidFill>
+                  <a:srgbClr val="22282E"/>
+                </a:solidFill>
+              </a:rPr>
+              <a:t>•  El diagrama debe leerse como una cadena de supuestos: verificar un nodo no demuestra los siguientes. La evaluación declara actor, acceso, datos, métrica, umbral y consecuencia; compara una línea base…</a:t>
+            </a:r>
+          </a:p>
+          <a:p>
+            <a:pPr>
+              <a:spcAft>
+                <a:spcPts val="600"/>
+              </a:spcAft>
+            </a:pPr>
+            <a:r>
+              <a:rPr sz="1500">
+                <a:solidFill>
+                  <a:srgbClr val="22282E"/>
+                </a:solidFill>
+              </a:rPr>
+              <a:t>•  Un ataque digital funciona sobre archivos pero no al fotografiar la señal. El informe limita la conclusión al canal probado.</a:t>
             </a:r>
           </a:p>
         </p:txBody>
@@ -4286,7 +4752,7 @@
                   <a:srgbClr val="0B3D2E"/>
                 </a:solidFill>
               </a:rPr>
-              <a:t>🧰 Herramientas y preparación</a:t>
+              <a:t>📔 Glosario operativo</a:t>
             </a:r>
           </a:p>
         </p:txBody>
@@ -4324,52 +4790,52 @@
                   <a:srgbClr val="22282E"/>
                 </a:solidFill>
               </a:rPr>
-              <a:t>•  pip install adversarial-robustness-toolbox torch torchvision numpy matplotlib</a:t>
-            </a:r>
-          </a:p>
-          <a:p>
-            <a:pPr>
-              <a:spcAft>
-                <a:spcPts val="600"/>
-              </a:spcAft>
-            </a:pPr>
-            <a:r>
-              <a:rPr sz="1500">
-                <a:solidFill>
-                  <a:srgbClr val="22282E"/>
-                </a:solidFill>
-              </a:rPr>
-              <a:t>•  Adversarial Robustness Toolbox (ART) — ataques y defensas listas para PyTorch/TensorFlow.</a:t>
-            </a:r>
-          </a:p>
-          <a:p>
-            <a:pPr>
-              <a:spcAft>
-                <a:spcPts val="600"/>
-              </a:spcAft>
-            </a:pPr>
-            <a:r>
-              <a:rPr sz="1500">
-                <a:solidFill>
-                  <a:srgbClr val="22282E"/>
-                </a:solidFill>
-              </a:rPr>
-              <a:t>•  Un modelo propio ya entrenado (p. ej. CNN pequeña sobre MNIST/CIFAR-10). Guarda sus pesos.</a:t>
-            </a:r>
-          </a:p>
-          <a:p>
-            <a:pPr>
-              <a:spcAft>
-                <a:spcPts val="600"/>
-              </a:spcAft>
-            </a:pPr>
-            <a:r>
-              <a:rPr sz="1500">
-                <a:solidFill>
-                  <a:srgbClr val="22282E"/>
-                </a:solidFill>
-              </a:rPr>
-              <a:t>•  GPU opcional; MNIST corre bien en CPU.</a:t>
+              <a:t>•  Término — Definición</a:t>
+            </a:r>
+          </a:p>
+          <a:p>
+            <a:pPr>
+              <a:spcAft>
+                <a:spcPts val="600"/>
+              </a:spcAft>
+            </a:pPr>
+            <a:r>
+              <a:rPr sz="1500">
+                <a:solidFill>
+                  <a:srgbClr val="22282E"/>
+                </a:solidFill>
+              </a:rPr>
+              <a:t>•  Robustez — Desempeño bajo variaciones definidas, no inmunidad universal.</a:t>
+            </a:r>
+          </a:p>
+          <a:p>
+            <a:pPr>
+              <a:spcAft>
+                <a:spcPts val="600"/>
+              </a:spcAft>
+            </a:pPr>
+            <a:r>
+              <a:rPr sz="1500">
+                <a:solidFill>
+                  <a:srgbClr val="22282E"/>
+                </a:solidFill>
+              </a:rPr>
+              <a:t>•  Evaluación — Experimento reproducible ligado a un riesgo y criterio.</a:t>
+            </a:r>
+          </a:p>
+          <a:p>
+            <a:pPr>
+              <a:spcAft>
+                <a:spcPts val="600"/>
+              </a:spcAft>
+            </a:pPr>
+            <a:r>
+              <a:rPr sz="1500">
+                <a:solidFill>
+                  <a:srgbClr val="22282E"/>
+                </a:solidFill>
+              </a:rPr>
+              <a:t>•  Riesgo residual — Exposición que permanece tras controles.</a:t>
             </a:r>
           </a:p>
         </p:txBody>
@@ -4420,7 +4886,7 @@
                   <a:srgbClr val="0B3D2E"/>
                 </a:solidFill>
               </a:rPr>
-              <a:t>🧪 Laboratorio guiado</a:t>
+              <a:t>✅ Criterio de dominio</a:t>
             </a:r>
           </a:p>
         </p:txBody>
@@ -4458,97 +4924,7 @@
                   <a:srgbClr val="22282E"/>
                 </a:solidFill>
               </a:rPr>
-              <a:t>•  Todo sobre un modelo y dataset propios.</a:t>
-            </a:r>
-          </a:p>
-          <a:p>
-            <a:pPr>
-              <a:spcAft>
-                <a:spcPts val="600"/>
-              </a:spcAft>
-            </a:pPr>
-            <a:r>
-              <a:rPr sz="1500">
-                <a:solidFill>
-                  <a:srgbClr val="22282E"/>
-                </a:solidFill>
-              </a:rPr>
-              <a:t>•  Entrena o carga un clasificador. Una CNN sobre MNIST alcanza &gt;98% en test limpio. Guarda model.pt.</a:t>
-            </a:r>
-          </a:p>
-          <a:p>
-            <a:pPr>
-              <a:spcAft>
-                <a:spcPts val="600"/>
-              </a:spcAft>
-            </a:pPr>
-            <a:r>
-              <a:rPr sz="1500">
-                <a:solidFill>
-                  <a:srgbClr val="22282E"/>
-                </a:solidFill>
-              </a:rPr>
-              <a:t>•  Envuelve el modelo con ART.</a:t>
-            </a:r>
-          </a:p>
-          <a:p>
-            <a:pPr>
-              <a:spcAft>
-                <a:spcPts val="600"/>
-              </a:spcAft>
-            </a:pPr>
-            <a:r>
-              <a:rPr sz="1500">
-                <a:solidFill>
-                  <a:srgbClr val="22282E"/>
-                </a:solidFill>
-              </a:rPr>
-              <a:t>•  from art.estimators.classification import PyTorchClassifier</a:t>
-            </a:r>
-          </a:p>
-          <a:p>
-            <a:pPr>
-              <a:spcAft>
-                <a:spcPts val="600"/>
-              </a:spcAft>
-            </a:pPr>
-            <a:r>
-              <a:rPr sz="1500">
-                <a:solidFill>
-                  <a:srgbClr val="22282E"/>
-                </a:solidFill>
-              </a:rPr>
-              <a:t>•  clf = PyTorchClassifier(model=model, loss=lossfn,</a:t>
-            </a:r>
-          </a:p>
-          <a:p>
-            <a:pPr>
-              <a:spcAft>
-                <a:spcPts val="600"/>
-              </a:spcAft>
-            </a:pPr>
-            <a:r>
-              <a:rPr sz="1500">
-                <a:solidFill>
-                  <a:srgbClr val="22282E"/>
-                </a:solidFill>
-              </a:rPr>
-              <a:t>•  inputshape=(1,28,28), nbclasses=10,</a:t>
-            </a:r>
-          </a:p>
-          <a:p>
-            <a:pPr>
-              <a:spcAft>
-                <a:spcPts val="600"/>
-              </a:spcAft>
-            </a:pPr>
-            <a:r>
-              <a:rPr sz="1500">
-                <a:solidFill>
-                  <a:srgbClr val="22282E"/>
-                </a:solidFill>
-              </a:rPr>
-              <a:t>•  clipvalues=(0,1))</a:t>
+              <a:t>•  El alumno demuestra dominio cuando formula un escenario específico, reproduce evidencia, explica límites y diseña controles técnicos y de gobierno sin atribuir certeza al modelo.</a:t>
             </a:r>
           </a:p>
         </p:txBody>
@@ -4599,7 +4975,7 @@
                   <a:srgbClr val="0B3D2E"/>
                 </a:solidFill>
               </a:rPr>
-              <a:t>✍️ Ejercicios</a:t>
+              <a:t>📖 Definiciones y características</a:t>
             </a:r>
           </a:p>
         </p:txBody>
@@ -4637,82 +5013,97 @@
                   <a:srgbClr val="22282E"/>
                 </a:solidFill>
               </a:rPr>
-              <a:t>•  Explica por qué sign() del gradiente maximiza la pérdida bajo una restricción L∞.</a:t>
-            </a:r>
-          </a:p>
-          <a:p>
-            <a:pPr>
-              <a:spcAft>
-                <a:spcPts val="600"/>
-              </a:spcAft>
-            </a:pPr>
-            <a:r>
-              <a:rPr sz="1500">
-                <a:solidFill>
-                  <a:srgbClr val="22282E"/>
-                </a:solidFill>
-              </a:rPr>
-              <a:t>•  Compara la precisión adversarial de FGSM vs. PGD para el mismo ε y explica la diferencia.</a:t>
-            </a:r>
-          </a:p>
-          <a:p>
-            <a:pPr>
-              <a:spcAft>
-                <a:spcPts val="600"/>
-              </a:spcAft>
-            </a:pPr>
-            <a:r>
-              <a:rPr sz="1500">
-                <a:solidFill>
-                  <a:srgbClr val="22282E"/>
-                </a:solidFill>
-              </a:rPr>
-              <a:t>•  Genera adversariales con un modelo A y evalúalos en un modelo B distinto; mide la transferibilidad.</a:t>
-            </a:r>
-          </a:p>
-          <a:p>
-            <a:pPr>
-              <a:spcAft>
-                <a:spcPts val="600"/>
-              </a:spcAft>
-            </a:pPr>
-            <a:r>
-              <a:rPr sz="1500">
-                <a:solidFill>
-                  <a:srgbClr val="22282E"/>
-                </a:solidFill>
-              </a:rPr>
-              <a:t>•  Implementa un ataque L2 (CarliniL2Method) y compara la magnitud de perturbación con L∞.</a:t>
-            </a:r>
-          </a:p>
-          <a:p>
-            <a:pPr>
-              <a:spcAft>
-                <a:spcPts val="600"/>
-              </a:spcAft>
-            </a:pPr>
-            <a:r>
-              <a:rPr sz="1500">
-                <a:solidFill>
-                  <a:srgbClr val="22282E"/>
-                </a:solidFill>
-              </a:rPr>
-              <a:t>•  Muestra 5 pares (original, adversarial) y comenta si un humano notaría la diferencia.</a:t>
-            </a:r>
-          </a:p>
-          <a:p>
-            <a:pPr>
-              <a:spcAft>
-                <a:spcPts val="600"/>
-              </a:spcAft>
-            </a:pPr>
-            <a:r>
-              <a:rPr sz="1500">
-                <a:solidFill>
-                  <a:srgbClr val="22282E"/>
-                </a:solidFill>
-              </a:rPr>
-              <a:t>•  Estima cuánto más tarda el entrenamiento adversarial frente al normal y discute si compensa.</a:t>
+              <a:t>•  Ejemplo adversarial: entrada x' = x + δ con ‖δ‖ ≤ ε que causa una predicción errónea. Característica: δ suele ser imperceptible para un humano.</a:t>
+            </a:r>
+          </a:p>
+          <a:p>
+            <a:pPr>
+              <a:spcAft>
+                <a:spcPts val="600"/>
+              </a:spcAft>
+            </a:pPr>
+            <a:r>
+              <a:rPr sz="1500">
+                <a:solidFill>
+                  <a:srgbClr val="22282E"/>
+                </a:solidFill>
+              </a:rPr>
+              <a:t>•  FGSM (Fast Gradient Sign Method): x' = x + ε · sign(∇ₓ J(θ,x,y)). Característica: un solo paso, rápido pero subóptimo.</a:t>
+            </a:r>
+          </a:p>
+          <a:p>
+            <a:pPr>
+              <a:spcAft>
+                <a:spcPts val="600"/>
+              </a:spcAft>
+            </a:pPr>
+            <a:r>
+              <a:rPr sz="1500">
+                <a:solidFill>
+                  <a:srgbClr val="22282E"/>
+                </a:solidFill>
+              </a:rPr>
+              <a:t>•  PGD (Projected Gradient Descent): FGSM iterado con proyección a la bola de radio ε. Característica: ataque fuerte, referencia para evaluar defensas.</a:t>
+            </a:r>
+          </a:p>
+          <a:p>
+            <a:pPr>
+              <a:spcAft>
+                <a:spcPts val="600"/>
+              </a:spcAft>
+            </a:pPr>
+            <a:r>
+              <a:rPr sz="1500">
+                <a:solidFill>
+                  <a:srgbClr val="22282E"/>
+                </a:solidFill>
+              </a:rPr>
+              <a:t>•  Perturbación L∞: limita el cambio máximo por píxel. Característica: la más usada en visión; ε típico 8/255.</a:t>
+            </a:r>
+          </a:p>
+          <a:p>
+            <a:pPr>
+              <a:spcAft>
+                <a:spcPts val="600"/>
+              </a:spcAft>
+            </a:pPr>
+            <a:r>
+              <a:rPr sz="1500">
+                <a:solidFill>
+                  <a:srgbClr val="22282E"/>
+                </a:solidFill>
+              </a:rPr>
+              <a:t>•  Ataque dirigido: fuerza una clase objetivo específica; el no dirigido solo busca cualquier error.</a:t>
+            </a:r>
+          </a:p>
+          <a:p>
+            <a:pPr>
+              <a:spcAft>
+                <a:spcPts val="600"/>
+              </a:spcAft>
+            </a:pPr>
+            <a:r>
+              <a:rPr sz="1500">
+                <a:solidFill>
+                  <a:srgbClr val="22282E"/>
+                </a:solidFill>
+              </a:rPr>
+              <a:t>•  Transferibilidad: un adversarial generado con un modelo sustituto engaña a otro modelo distinto; habilita ataques de caja negra.</a:t>
+            </a:r>
+          </a:p>
+          <a:p>
+            <a:pPr>
+              <a:spcAft>
+                <a:spcPts val="600"/>
+              </a:spcAft>
+            </a:pPr>
+            <a:r>
+              <a:rPr sz="1500">
+                <a:solidFill>
+                  <a:srgbClr val="22282E"/>
+                </a:solidFill>
+              </a:rPr>
+              <a:t>•  Entrenamiento adversarial: entrenar con ejemplos adversariales generados sobre la marcha (Madry et al.); mejora robustez pero reduce precisión limpia y encarece el entrenamiento.</a:t>
             </a:r>
           </a:p>
         </p:txBody>
@@ -4763,7 +5154,7 @@
                   <a:srgbClr val="0B3D2E"/>
                 </a:solidFill>
               </a:rPr>
-              <a:t>📝 Reto verificable</a:t>
+              <a:t>🧰 Herramientas y preparación</a:t>
             </a:r>
           </a:p>
         </p:txBody>
@@ -4801,22 +5192,37 @@
                   <a:srgbClr val="22282E"/>
                 </a:solidFill>
               </a:rPr>
-              <a:t>•  Entrega un informe de robustez de tu clasificador con: precisión limpia base, curva precisión vs. ε para PGD, un ejemplo dirigido exitoso, y la comparación antes/después de entrenamiento adversarial.</a:t>
-            </a:r>
-          </a:p>
-          <a:p>
-            <a:pPr>
-              <a:spcAft>
-                <a:spcPts val="600"/>
-              </a:spcAft>
-            </a:pPr>
-            <a:r>
-              <a:rPr sz="1500">
-                <a:solidFill>
-                  <a:srgbClr val="22282E"/>
-                </a:solidFill>
-              </a:rPr>
-              <a:t>•  Criterio de aceptación: con entrenamiento adversarial, la precisión bajo PGD (ε=0.2) mejora al menos 30 puntos porcentuales respecto al modelo sin defender, y el informe cuantifica explícitamente la caída de precisión limpia asociada. Todo el código es reproducible con python attack.py.</a:t>
+              <a:t>•  Adversarial Robustness Toolbox (ART) — ataques y defensas listas para PyTorch/TensorFlow.</a:t>
+            </a:r>
+          </a:p>
+          <a:p>
+            <a:pPr>
+              <a:spcAft>
+                <a:spcPts val="600"/>
+              </a:spcAft>
+            </a:pPr>
+            <a:r>
+              <a:rPr sz="1500">
+                <a:solidFill>
+                  <a:srgbClr val="22282E"/>
+                </a:solidFill>
+              </a:rPr>
+              <a:t>•  Un modelo propio ya entrenado (p. ej. CNN pequeña sobre MNIST/CIFAR-10). Guarda sus pesos.</a:t>
+            </a:r>
+          </a:p>
+          <a:p>
+            <a:pPr>
+              <a:spcAft>
+                <a:spcPts val="600"/>
+              </a:spcAft>
+            </a:pPr>
+            <a:r>
+              <a:rPr sz="1500">
+                <a:solidFill>
+                  <a:srgbClr val="22282E"/>
+                </a:solidFill>
+              </a:rPr>
+              <a:t>•  GPU opcional; MNIST corre bien en CPU.</a:t>
             </a:r>
           </a:p>
         </p:txBody>
